--- a/assets/figures-editable/appendix-studies/a-e18.pptx
+++ b/assets/figures-editable/appendix-studies/a-e18.pptx
@@ -7,7 +7,7 @@
   <p:sldIdLst>
     <p:sldId id="256" r:id="rId7"/>
   </p:sldIdLst>
-  <p:sldSz cx="8961120" cy="6080760" type="screen4x3"/>
+  <p:sldSz cx="12191695" cy="6858000" type="screen4x3"/>
   <p:notesSz cx="6858000" cy="9144000"/>
   <p:defaultTextStyle>
     <a:defPPr>
@@ -3098,14 +3098,14 @@
       <p:grpSpPr/>
       <p:sp>
         <p:nvSpPr>
-          <p:cNvPr id="2" name="text 0" descr="sci-ppt:obj-000"/>
+          <p:cNvPr id="2" name="A-E18 text 0" descr="sci-ppt:o000"/>
           <p:cNvSpPr txBox="1"/>
           <p:nvPr/>
         </p:nvSpPr>
         <p:spPr>
           <a:xfrm>
-            <a:off x="256032" y="137160"/>
-            <a:ext cx="7315200" cy="310896"/>
+            <a:off x="274320" y="118872"/>
+            <a:ext cx="11612880" cy="340105"/>
           </a:xfrm>
           <a:prstGeom prst="rect">
             <a:avLst/>
@@ -3114,7 +3114,7 @@
           <a:effectLst/>
         </p:spPr>
         <p:txBody>
-          <a:bodyPr wrap="none" lIns="0" rIns="0" tIns="0" bIns="0" anchor="ctr">
+          <a:bodyPr wrap="none" lIns="18288" rIns="18288" tIns="18288" bIns="18288" anchor="t">
             <a:spAutoFit/>
           </a:bodyPr>
           <a:lstStyle/>
@@ -3125,27 +3125,27 @@
               </a:spcAft>
             </a:pPr>
             <a:r>
-              <a:rPr sz="1439" b="0" i="0">
+              <a:rPr sz="1900" b="1" i="0">
                 <a:solidFill>
                   <a:srgbClr val="8EDBD4"/>
                 </a:solidFill>
                 <a:latin typeface="Arial"/>
               </a:rPr>
-              <a:t>A-E18 · Physical variable map</a:t>
-            </a:r>
-          </a:p>
-        </p:txBody>
-      </p:sp>
-      <p:sp>
-        <p:nvSpPr>
-          <p:cNvPr id="3" name="text 1" descr="sci-ppt:obj-001"/>
+              <a:t>A-E18 · Teaching response-time comparison</a:t>
+            </a:r>
+          </a:p>
+        </p:txBody>
+      </p:sp>
+      <p:sp>
+        <p:nvSpPr>
+          <p:cNvPr id="3" name="A-E18 text 1" descr="sci-ppt:o001"/>
           <p:cNvSpPr txBox="1"/>
           <p:nvPr/>
         </p:nvSpPr>
         <p:spPr>
           <a:xfrm>
-            <a:off x="886968" y="612648"/>
-            <a:ext cx="7315200" cy="310896"/>
+            <a:off x="457200" y="914400"/>
+            <a:ext cx="11247120" cy="254889"/>
           </a:xfrm>
           <a:prstGeom prst="rect">
             <a:avLst/>
@@ -3154,7 +3154,7 @@
           <a:effectLst/>
         </p:spPr>
         <p:txBody>
-          <a:bodyPr wrap="none" lIns="0" rIns="0" tIns="0" bIns="0" anchor="ctr">
+          <a:bodyPr wrap="none" lIns="18288" rIns="18288" tIns="18288" bIns="18288" anchor="t">
             <a:spAutoFit/>
           </a:bodyPr>
           <a:lstStyle/>
@@ -3165,59 +3165,27 @@
               </a:spcAft>
             </a:pPr>
             <a:r>
-              <a:rPr sz="1296" b="0" i="0">
+              <a:rPr sz="1350" b="1" i="0">
                 <a:solidFill>
-                  <a:srgbClr val="E7F0F3"/>
+                  <a:srgbClr val="8EDBD4"/>
                 </a:solidFill>
                 <a:latin typeface="Arial"/>
               </a:rPr>
-              <a:t>Comparison of two declared controls</a:t>
-            </a:r>
-          </a:p>
-        </p:txBody>
-      </p:sp>
-      <p:sp>
-        <p:nvSpPr>
-          <p:cNvPr id="4" name="rect 2" descr="sci-ppt:obj-002"/>
-          <p:cNvSpPr/>
+              <a:t>How long does the gel need to answer, compared with the collapse it is meant to follow?</a:t>
+            </a:r>
+          </a:p>
+        </p:txBody>
+      </p:sp>
+      <p:sp>
+        <p:nvSpPr>
+          <p:cNvPr id="4" name="A-E18 text 2" descr="sci-ppt:o002"/>
+          <p:cNvSpPr txBox="1"/>
           <p:nvPr/>
         </p:nvSpPr>
         <p:spPr>
           <a:xfrm>
-            <a:off x="996696" y="1088136"/>
-            <a:ext cx="5577840" cy="365760"/>
-          </a:xfrm>
-          <a:prstGeom prst="rect">
-            <a:avLst/>
-          </a:prstGeom>
-          <a:solidFill>
-            <a:srgbClr val="213E4B"/>
-          </a:solidFill>
-          <a:ln w="17780">
-            <a:solidFill>
-              <a:srgbClr val="B4C7D2"/>
-            </a:solidFill>
-          </a:ln>
-          <a:effectLst/>
-        </p:spPr>
-        <p:txBody>
-          <a:bodyPr rtlCol="0" anchor="ctr"/>
-          <a:lstStyle/>
-          <a:p>
-            <a:pPr algn="ctr"/>
-          </a:p>
-        </p:txBody>
-      </p:sp>
-      <p:sp>
-        <p:nvSpPr>
-          <p:cNvPr id="5" name="text 3" descr="sci-ppt:obj-003"/>
-          <p:cNvSpPr txBox="1"/>
-          <p:nvPr/>
-        </p:nvSpPr>
-        <p:spPr>
-          <a:xfrm>
-            <a:off x="1188720" y="1143000"/>
-            <a:ext cx="5120640" cy="310896"/>
+            <a:off x="457200" y="1481328"/>
+            <a:ext cx="4480560" cy="247142"/>
           </a:xfrm>
           <a:prstGeom prst="rect">
             <a:avLst/>
@@ -3226,7 +3194,7 @@
           <a:effectLst/>
         </p:spPr>
         <p:txBody>
-          <a:bodyPr wrap="none" lIns="0" rIns="0" tIns="0" bIns="0" anchor="ctr">
+          <a:bodyPr wrap="none" lIns="18288" rIns="18288" tIns="18288" bIns="18288" anchor="t">
             <a:spAutoFit/>
           </a:bodyPr>
           <a:lstStyle/>
@@ -3237,37 +3205,41 @@
               </a:spcAft>
             </a:pPr>
             <a:r>
-              <a:rPr sz="1296" b="0" i="0">
+              <a:rPr sz="1300" b="0" i="0">
                 <a:solidFill>
                   <a:srgbClr val="E7F0F3"/>
                 </a:solidFill>
                 <a:latin typeface="Arial"/>
               </a:rPr>
-              <a:t>ts = 6.70820 µs — shear transit</a:t>
-            </a:r>
-          </a:p>
-        </p:txBody>
-      </p:sp>
-      <p:sp>
-        <p:nvSpPr>
-          <p:cNvPr id="6" name="rect 4" descr="sci-ppt:obj-004"/>
+              <a:t>shear-wave crossing  tₛ = L_g / cₛ</a:t>
+            </a:r>
+          </a:p>
+        </p:txBody>
+      </p:sp>
+      <p:sp>
+        <p:nvSpPr>
+          <p:cNvPr id="5" name="A-E18 rect 3" descr="sci-ppt:o003"/>
           <p:cNvSpPr/>
           <p:nvPr/>
         </p:nvSpPr>
         <p:spPr>
           <a:xfrm>
-            <a:off x="996696" y="1892807"/>
-            <a:ext cx="2286000" cy="365760"/>
+            <a:off x="5029200" y="1463040"/>
+            <a:ext cx="4523811" cy="548640"/>
           </a:xfrm>
           <a:prstGeom prst="rect">
             <a:avLst/>
           </a:prstGeom>
           <a:solidFill>
-            <a:srgbClr val="213E4B"/>
+            <a:srgbClr val="F2B880">
+              <a:alpha val="85000"/>
+            </a:srgbClr>
           </a:solidFill>
-          <a:ln w="17780">
+          <a:ln w="12700">
             <a:solidFill>
-              <a:srgbClr val="B4C7D2"/>
+              <a:srgbClr val="F2B880">
+                <a:alpha val="85000"/>
+              </a:srgbClr>
             </a:solidFill>
           </a:ln>
           <a:effectLst/>
@@ -3282,14 +3254,14 @@
       </p:sp>
       <p:sp>
         <p:nvSpPr>
-          <p:cNvPr id="7" name="text 5" descr="sci-ppt:obj-005"/>
+          <p:cNvPr id="6" name="A-E18 text 4" descr="sci-ppt:o004"/>
           <p:cNvSpPr txBox="1"/>
           <p:nvPr/>
         </p:nvSpPr>
         <p:spPr>
           <a:xfrm>
-            <a:off x="1188720" y="1947672"/>
-            <a:ext cx="2103120" cy="310896"/>
+            <a:off x="9626163" y="1508760"/>
+            <a:ext cx="1371600" cy="247142"/>
           </a:xfrm>
           <a:prstGeom prst="rect">
             <a:avLst/>
@@ -3298,7 +3270,7 @@
           <a:effectLst/>
         </p:spPr>
         <p:txBody>
-          <a:bodyPr wrap="none" lIns="0" rIns="0" tIns="0" bIns="0" anchor="ctr">
+          <a:bodyPr wrap="none" lIns="18288" rIns="18288" tIns="18288" bIns="18288" anchor="t">
             <a:spAutoFit/>
           </a:bodyPr>
           <a:lstStyle/>
@@ -3309,27 +3281,27 @@
               </a:spcAft>
             </a:pPr>
             <a:r>
-              <a:rPr sz="1152" b="0" i="0">
+              <a:rPr sz="1300" b="1" i="0">
                 <a:solidFill>
                   <a:srgbClr val="E7F0F3"/>
                 </a:solidFill>
                 <a:latin typeface="Arial"/>
               </a:rPr>
-              <a:t>tc,liq = 2.74404 µs</a:t>
-            </a:r>
-          </a:p>
-        </p:txBody>
-      </p:sp>
-      <p:sp>
-        <p:nvSpPr>
-          <p:cNvPr id="8" name="text 6" descr="sci-ppt:obj-006"/>
+              <a:t>6.7082 µs</a:t>
+            </a:r>
+          </a:p>
+        </p:txBody>
+      </p:sp>
+      <p:sp>
+        <p:nvSpPr>
+          <p:cNvPr id="7" name="A-E18 text 5" descr="sci-ppt:o005"/>
           <p:cNvSpPr txBox="1"/>
           <p:nvPr/>
         </p:nvSpPr>
         <p:spPr>
           <a:xfrm>
-            <a:off x="3566160" y="1965960"/>
-            <a:ext cx="3749039" cy="310896"/>
+            <a:off x="457200" y="2350008"/>
+            <a:ext cx="4480560" cy="247142"/>
           </a:xfrm>
           <a:prstGeom prst="rect">
             <a:avLst/>
@@ -3338,7 +3310,7 @@
           <a:effectLst/>
         </p:spPr>
         <p:txBody>
-          <a:bodyPr wrap="none" lIns="0" rIns="0" tIns="0" bIns="0" anchor="ctr">
+          <a:bodyPr wrap="none" lIns="18288" rIns="18288" tIns="18288" bIns="18288" anchor="t">
             <a:spAutoFit/>
           </a:bodyPr>
           <a:lstStyle/>
@@ -3349,27 +3321,63 @@
               </a:spcAft>
             </a:pPr>
             <a:r>
-              <a:rPr sz="1224" b="0" i="0">
+              <a:rPr sz="1300" b="0" i="0">
                 <a:solidFill>
                   <a:srgbClr val="E7F0F3"/>
                 </a:solidFill>
                 <a:latin typeface="Arial"/>
               </a:rPr>
-              <a:t>Ideal liquid collapse</a:t>
-            </a:r>
-          </a:p>
-        </p:txBody>
-      </p:sp>
-      <p:sp>
-        <p:nvSpPr>
-          <p:cNvPr id="9" name="text 7" descr="sci-ppt:obj-007"/>
+              <a:t>ideal liquid collapse  t_c,liq</a:t>
+            </a:r>
+          </a:p>
+        </p:txBody>
+      </p:sp>
+      <p:sp>
+        <p:nvSpPr>
+          <p:cNvPr id="8" name="A-E18 rect 6" descr="sci-ppt:o006"/>
+          <p:cNvSpPr/>
+          <p:nvPr/>
+        </p:nvSpPr>
+        <p:spPr>
+          <a:xfrm>
+            <a:off x="5029200" y="2331720"/>
+            <a:ext cx="1850500" cy="548640"/>
+          </a:xfrm>
+          <a:prstGeom prst="rect">
+            <a:avLst/>
+          </a:prstGeom>
+          <a:solidFill>
+            <a:srgbClr val="8EDBD4">
+              <a:alpha val="85000"/>
+            </a:srgbClr>
+          </a:solidFill>
+          <a:ln w="12700">
+            <a:solidFill>
+              <a:srgbClr val="8EDBD4">
+                <a:alpha val="85000"/>
+              </a:srgbClr>
+            </a:solidFill>
+          </a:ln>
+          <a:effectLst/>
+        </p:spPr>
+        <p:txBody>
+          <a:bodyPr rtlCol="0" anchor="ctr"/>
+          <a:lstStyle/>
+          <a:p>
+            <a:pPr algn="ctr"/>
+          </a:p>
+        </p:txBody>
+      </p:sp>
+      <p:sp>
+        <p:nvSpPr>
+          <p:cNvPr id="9" name="A-E18 text 7" descr="sci-ppt:o007"/>
           <p:cNvSpPr txBox="1"/>
           <p:nvPr/>
         </p:nvSpPr>
         <p:spPr>
           <a:xfrm>
-            <a:off x="1005840" y="2670048"/>
-            <a:ext cx="7498079" cy="310896"/>
+            <a:off x="6952852" y="2377439"/>
+            <a:ext cx="1371600" cy="247142"/>
           </a:xfrm>
           <a:prstGeom prst="rect">
             <a:avLst/>
@@ -3378,7 +3386,7 @@
           <a:effectLst/>
         </p:spPr>
         <p:txBody>
-          <a:bodyPr wrap="none" lIns="0" rIns="0" tIns="0" bIns="0" anchor="ctr">
+          <a:bodyPr wrap="none" lIns="18288" rIns="18288" tIns="18288" bIns="18288" anchor="t">
             <a:spAutoFit/>
           </a:bodyPr>
           <a:lstStyle/>
@@ -3389,27 +3397,59 @@
               </a:spcAft>
             </a:pPr>
             <a:r>
-              <a:rPr sz="1296" b="0" i="0">
+              <a:rPr sz="1300" b="1" i="0">
                 <a:solidFill>
                   <a:srgbClr val="E7F0F3"/>
                 </a:solidFill>
                 <a:latin typeface="Arial"/>
               </a:rPr>
-              <a:t>ts / tc,liq = 2.44464 ; Lg = Rmax = 30 µm</a:t>
-            </a:r>
-          </a:p>
-        </p:txBody>
-      </p:sp>
-      <p:sp>
-        <p:nvSpPr>
-          <p:cNvPr id="10" name="text 8" descr="sci-ppt:obj-008"/>
+              <a:t>2.7440 µs</a:t>
+            </a:r>
+          </a:p>
+        </p:txBody>
+      </p:sp>
+      <p:sp>
+        <p:nvSpPr>
+          <p:cNvPr id="10" name="A-E18 round_rect 8" descr="sci-ppt:o008"/>
+          <p:cNvSpPr/>
+          <p:nvPr/>
+        </p:nvSpPr>
+        <p:spPr>
+          <a:xfrm>
+            <a:off x="457200" y="3566160"/>
+            <a:ext cx="5486400" cy="2103120"/>
+          </a:xfrm>
+          <a:prstGeom prst="roundRect">
+            <a:avLst/>
+          </a:prstGeom>
+          <a:solidFill>
+            <a:srgbClr val="213E4B"/>
+          </a:solidFill>
+          <a:ln w="20320">
+            <a:solidFill>
+              <a:srgbClr val="8EDBD4"/>
+            </a:solidFill>
+          </a:ln>
+          <a:effectLst/>
+        </p:spPr>
+        <p:txBody>
+          <a:bodyPr rtlCol="0" anchor="ctr"/>
+          <a:lstStyle/>
+          <a:p>
+            <a:pPr algn="ctr"/>
+          </a:p>
+        </p:txBody>
+      </p:sp>
+      <p:sp>
+        <p:nvSpPr>
+          <p:cNvPr id="11" name="A-E18 text 9" descr="sci-ppt:o009"/>
           <p:cNvSpPr txBox="1"/>
           <p:nvPr/>
         </p:nvSpPr>
         <p:spPr>
           <a:xfrm>
-            <a:off x="256032" y="3465576"/>
-            <a:ext cx="7315200" cy="310896"/>
+            <a:off x="566928" y="3621024"/>
+            <a:ext cx="5266944" cy="247142"/>
           </a:xfrm>
           <a:prstGeom prst="rect">
             <a:avLst/>
@@ -3418,7 +3458,7 @@
           <a:effectLst/>
         </p:spPr>
         <p:txBody>
-          <a:bodyPr wrap="none" lIns="0" rIns="0" tIns="0" bIns="0" anchor="ctr">
+          <a:bodyPr wrap="none" lIns="18288" rIns="18288" tIns="18288" bIns="18288" anchor="t">
             <a:spAutoFit/>
           </a:bodyPr>
           <a:lstStyle/>
@@ -3429,27 +3469,27 @@
               </a:spcAft>
             </a:pPr>
             <a:r>
-              <a:rPr sz="1296" b="0" i="0">
+              <a:rPr sz="1300" b="1" i="0">
                 <a:solidFill>
                   <a:srgbClr val="8EDBD4"/>
                 </a:solidFill>
                 <a:latin typeface="Arial"/>
               </a:rPr>
-              <a:t>Variables and physical limits</a:t>
-            </a:r>
-          </a:p>
-        </p:txBody>
-      </p:sp>
-      <p:sp>
-        <p:nvSpPr>
-          <p:cNvPr id="11" name="text 9" descr="sci-ppt:obj-009"/>
+              <a:t>Numbers</a:t>
+            </a:r>
+          </a:p>
+        </p:txBody>
+      </p:sp>
+      <p:sp>
+        <p:nvSpPr>
+          <p:cNvPr id="12" name="A-E18 text 10" descr="sci-ppt:o010"/>
           <p:cNvSpPr txBox="1"/>
           <p:nvPr/>
         </p:nvSpPr>
         <p:spPr>
           <a:xfrm>
-            <a:off x="365760" y="3813048"/>
-            <a:ext cx="8412480" cy="310896"/>
+            <a:off x="594360" y="4023360"/>
+            <a:ext cx="5212080" cy="231648"/>
           </a:xfrm>
           <a:prstGeom prst="rect">
             <a:avLst/>
@@ -3458,7 +3498,7 @@
           <a:effectLst/>
         </p:spPr>
         <p:txBody>
-          <a:bodyPr wrap="none" lIns="0" rIns="0" tIns="0" bIns="0" anchor="ctr">
+          <a:bodyPr wrap="none" lIns="18288" rIns="18288" tIns="18288" bIns="18288" anchor="t">
             <a:spAutoFit/>
           </a:bodyPr>
           <a:lstStyle/>
@@ -3469,27 +3509,27 @@
               </a:spcAft>
             </a:pPr>
             <a:r>
-              <a:rPr sz="1152" b="0" i="0">
+              <a:rPr sz="1200" b="1" i="0">
                 <a:solidFill>
                   <a:srgbClr val="E7F0F3"/>
                 </a:solidFill>
                 <a:latin typeface="Arial"/>
               </a:rPr>
-              <a:t>• Lg = Rmax = 30 µm</a:t>
-            </a:r>
-          </a:p>
-        </p:txBody>
-      </p:sp>
-      <p:sp>
-        <p:nvSpPr>
-          <p:cNvPr id="12" name="text 10" descr="sci-ppt:obj-010"/>
+              <a:t>cₛ = √(G_g/ρ_g) = 4.47213595 m/s</a:t>
+            </a:r>
+          </a:p>
+        </p:txBody>
+      </p:sp>
+      <p:sp>
+        <p:nvSpPr>
+          <p:cNvPr id="13" name="A-E18 text 11" descr="sci-ppt:o011"/>
           <p:cNvSpPr txBox="1"/>
           <p:nvPr/>
         </p:nvSpPr>
         <p:spPr>
           <a:xfrm>
-            <a:off x="365760" y="4023360"/>
-            <a:ext cx="8412480" cy="310896"/>
+            <a:off x="594360" y="4526280"/>
+            <a:ext cx="5212080" cy="231648"/>
           </a:xfrm>
           <a:prstGeom prst="rect">
             <a:avLst/>
@@ -3498,7 +3538,7 @@
           <a:effectLst/>
         </p:spPr>
         <p:txBody>
-          <a:bodyPr wrap="none" lIns="0" rIns="0" tIns="0" bIns="0" anchor="ctr">
+          <a:bodyPr wrap="none" lIns="18288" rIns="18288" tIns="18288" bIns="18288" anchor="t">
             <a:spAutoFit/>
           </a:bodyPr>
           <a:lstStyle/>
@@ -3509,27 +3549,27 @@
               </a:spcAft>
             </a:pPr>
             <a:r>
-              <a:rPr sz="1152" b="0" i="0">
+              <a:rPr sz="1200" b="1" i="0">
                 <a:solidFill>
                   <a:srgbClr val="E7F0F3"/>
                 </a:solidFill>
                 <a:latin typeface="Arial"/>
               </a:rPr>
-              <a:t>• Gg = 20 kPa</a:t>
-            </a:r>
-          </a:p>
-        </p:txBody>
-      </p:sp>
-      <p:sp>
-        <p:nvSpPr>
-          <p:cNvPr id="13" name="text 11" descr="sci-ppt:obj-011"/>
+              <a:t>tₛ = 30 µm / cₛ = 6.70820393 µs</a:t>
+            </a:r>
+          </a:p>
+        </p:txBody>
+      </p:sp>
+      <p:sp>
+        <p:nvSpPr>
+          <p:cNvPr id="14" name="A-E18 text 12" descr="sci-ppt:o012"/>
           <p:cNvSpPr txBox="1"/>
           <p:nvPr/>
         </p:nvSpPr>
         <p:spPr>
           <a:xfrm>
-            <a:off x="365760" y="4233672"/>
-            <a:ext cx="8412480" cy="310896"/>
+            <a:off x="594360" y="5029200"/>
+            <a:ext cx="5212080" cy="223900"/>
           </a:xfrm>
           <a:prstGeom prst="rect">
             <a:avLst/>
@@ -3538,7 +3578,7 @@
           <a:effectLst/>
         </p:spPr>
         <p:txBody>
-          <a:bodyPr wrap="none" lIns="0" rIns="0" tIns="0" bIns="0" anchor="ctr">
+          <a:bodyPr wrap="none" lIns="18288" rIns="18288" tIns="18288" bIns="18288" anchor="t">
             <a:spAutoFit/>
           </a:bodyPr>
           <a:lstStyle/>
@@ -3549,27 +3589,59 @@
               </a:spcAft>
             </a:pPr>
             <a:r>
-              <a:rPr sz="1152" b="0" i="0">
+              <a:rPr sz="1150" b="1" i="0">
                 <a:solidFill>
                   <a:srgbClr val="E7F0F3"/>
                 </a:solidFill>
                 <a:latin typeface="Arial"/>
               </a:rPr>
-              <a:t>• ρg = ρl = 1000 kg/m³</a:t>
-            </a:r>
-          </a:p>
-        </p:txBody>
-      </p:sp>
-      <p:sp>
-        <p:nvSpPr>
-          <p:cNvPr id="14" name="text 12" descr="sci-ppt:obj-012"/>
+              <a:t>t_c,liq = 0.91468 Rₘₐₓ √(ρₗ/Δp_c) = 2.74404407 µs</a:t>
+            </a:r>
+          </a:p>
+        </p:txBody>
+      </p:sp>
+      <p:sp>
+        <p:nvSpPr>
+          <p:cNvPr id="15" name="A-E18 round_rect 13" descr="sci-ppt:o013"/>
+          <p:cNvSpPr/>
+          <p:nvPr/>
+        </p:nvSpPr>
+        <p:spPr>
+          <a:xfrm>
+            <a:off x="6217920" y="3566160"/>
+            <a:ext cx="5486400" cy="2103120"/>
+          </a:xfrm>
+          <a:prstGeom prst="roundRect">
+            <a:avLst/>
+          </a:prstGeom>
+          <a:solidFill>
+            <a:srgbClr val="213E4B"/>
+          </a:solidFill>
+          <a:ln w="20320">
+            <a:solidFill>
+              <a:srgbClr val="F2B880"/>
+            </a:solidFill>
+          </a:ln>
+          <a:effectLst/>
+        </p:spPr>
+        <p:txBody>
+          <a:bodyPr rtlCol="0" anchor="ctr"/>
+          <a:lstStyle/>
+          <a:p>
+            <a:pPr algn="ctr"/>
+          </a:p>
+        </p:txBody>
+      </p:sp>
+      <p:sp>
+        <p:nvSpPr>
+          <p:cNvPr id="16" name="A-E18 text 14" descr="sci-ppt:o014"/>
           <p:cNvSpPr txBox="1"/>
           <p:nvPr/>
         </p:nvSpPr>
         <p:spPr>
           <a:xfrm>
-            <a:off x="365760" y="4443984"/>
-            <a:ext cx="8412480" cy="310896"/>
+            <a:off x="6327648" y="3621024"/>
+            <a:ext cx="5266944" cy="247142"/>
           </a:xfrm>
           <a:prstGeom prst="rect">
             <a:avLst/>
@@ -3578,7 +3650,7 @@
           <a:effectLst/>
         </p:spPr>
         <p:txBody>
-          <a:bodyPr wrap="none" lIns="0" rIns="0" tIns="0" bIns="0" anchor="ctr">
+          <a:bodyPr wrap="none" lIns="18288" rIns="18288" tIns="18288" bIns="18288" anchor="t">
             <a:spAutoFit/>
           </a:bodyPr>
           <a:lstStyle/>
@@ -3589,27 +3661,27 @@
               </a:spcAft>
             </a:pPr>
             <a:r>
-              <a:rPr sz="1152" b="0" i="0">
+              <a:rPr sz="1300" b="1" i="0">
                 <a:solidFill>
-                  <a:srgbClr val="E7F0F3"/>
+                  <a:srgbClr val="F2B880"/>
                 </a:solidFill>
                 <a:latin typeface="Arial"/>
               </a:rPr>
-              <a:t>• cs = 4.47214 m/s</a:t>
-            </a:r>
-          </a:p>
-        </p:txBody>
-      </p:sp>
-      <p:sp>
-        <p:nvSpPr>
-          <p:cNvPr id="15" name="text 13" descr="sci-ppt:obj-013"/>
+              <a:t>Ratio</a:t>
+            </a:r>
+          </a:p>
+        </p:txBody>
+      </p:sp>
+      <p:sp>
+        <p:nvSpPr>
+          <p:cNvPr id="17" name="A-E18 text 15" descr="sci-ppt:o015"/>
           <p:cNvSpPr txBox="1"/>
           <p:nvPr/>
         </p:nvSpPr>
         <p:spPr>
           <a:xfrm>
-            <a:off x="365760" y="4654296"/>
-            <a:ext cx="8412480" cy="310896"/>
+            <a:off x="6355080" y="4114800"/>
+            <a:ext cx="5212080" cy="278130"/>
           </a:xfrm>
           <a:prstGeom prst="rect">
             <a:avLst/>
@@ -3618,7 +3690,7 @@
           <a:effectLst/>
         </p:spPr>
         <p:txBody>
-          <a:bodyPr wrap="none" lIns="0" rIns="0" tIns="0" bIns="0" anchor="ctr">
+          <a:bodyPr wrap="none" lIns="18288" rIns="18288" tIns="18288" bIns="18288" anchor="t">
             <a:spAutoFit/>
           </a:bodyPr>
           <a:lstStyle/>
@@ -3629,27 +3701,27 @@
               </a:spcAft>
             </a:pPr>
             <a:r>
-              <a:rPr sz="1152" b="0" i="0">
+              <a:rPr sz="1500" b="1" i="0">
                 <a:solidFill>
-                  <a:srgbClr val="E7F0F3"/>
+                  <a:srgbClr val="F2B880"/>
                 </a:solidFill>
                 <a:latin typeface="Arial"/>
               </a:rPr>
-              <a:t>• ts = 6.70820 µs</a:t>
-            </a:r>
-          </a:p>
-        </p:txBody>
-      </p:sp>
-      <p:sp>
-        <p:nvSpPr>
-          <p:cNvPr id="16" name="text 14" descr="sci-ppt:obj-014"/>
+              <a:t>tₛ / t_c,liq = 2.44464147</a:t>
+            </a:r>
+          </a:p>
+        </p:txBody>
+      </p:sp>
+      <p:sp>
+        <p:nvSpPr>
+          <p:cNvPr id="18" name="A-E18 text 16" descr="sci-ppt:o016"/>
           <p:cNvSpPr txBox="1"/>
           <p:nvPr/>
         </p:nvSpPr>
         <p:spPr>
           <a:xfrm>
-            <a:off x="365760" y="4864608"/>
-            <a:ext cx="8412480" cy="310896"/>
+            <a:off x="6355080" y="4754880"/>
+            <a:ext cx="5212080" cy="417576"/>
           </a:xfrm>
           <a:prstGeom prst="rect">
             <a:avLst/>
@@ -3658,7 +3730,7 @@
           <a:effectLst/>
         </p:spPr>
         <p:txBody>
-          <a:bodyPr wrap="none" lIns="0" rIns="0" tIns="0" bIns="0" anchor="ctr">
+          <a:bodyPr wrap="none" lIns="18288" rIns="18288" tIns="18288" bIns="18288" anchor="t">
             <a:spAutoFit/>
           </a:bodyPr>
           <a:lstStyle/>
@@ -3669,27 +3741,43 @@
               </a:spcAft>
             </a:pPr>
             <a:r>
-              <a:rPr sz="1152" b="0" i="0">
+              <a:rPr sz="1200" b="0" i="0">
                 <a:solidFill>
                   <a:srgbClr val="E7F0F3"/>
                 </a:solidFill>
                 <a:latin typeface="Arial"/>
               </a:rPr>
-              <a:t>• tc,liq = 2.74404 µs</a:t>
-            </a:r>
-          </a:p>
-        </p:txBody>
-      </p:sp>
-      <p:sp>
-        <p:nvSpPr>
-          <p:cNvPr id="17" name="text 15" descr="sci-ppt:obj-015"/>
+              <a:t>The gel communicates slower than the ideal liquid collapses: it</a:t>
+            </a:r>
+          </a:p>
+          <a:p>
+            <a:pPr algn="l">
+              <a:spcAft>
+                <a:spcPts val="0"/>
+              </a:spcAft>
+            </a:pPr>
+            <a:r>
+              <a:rPr sz="1200" b="0" i="0">
+                <a:solidFill>
+                  <a:srgbClr val="E7F0F3"/>
+                </a:solidFill>
+                <a:latin typeface="Arial"/>
+              </a:rPr>
+              <a:t>cannot be treated as quasi-static over the event.</a:t>
+            </a:r>
+          </a:p>
+        </p:txBody>
+      </p:sp>
+      <p:sp>
+        <p:nvSpPr>
+          <p:cNvPr id="19" name="A-E18 text 17" descr="sci-ppt:o017"/>
           <p:cNvSpPr txBox="1"/>
           <p:nvPr/>
         </p:nvSpPr>
         <p:spPr>
           <a:xfrm>
-            <a:off x="365760" y="5074920"/>
-            <a:ext cx="8412480" cy="310896"/>
+            <a:off x="320040" y="6510528"/>
+            <a:ext cx="11521440" cy="200660"/>
           </a:xfrm>
           <a:prstGeom prst="rect">
             <a:avLst/>
@@ -3698,7 +3786,7 @@
           <a:effectLst/>
         </p:spPr>
         <p:txBody>
-          <a:bodyPr wrap="none" lIns="0" rIns="0" tIns="0" bIns="0" anchor="ctr">
+          <a:bodyPr wrap="none" lIns="18288" rIns="18288" tIns="18288" bIns="18288" anchor="t">
             <a:spAutoFit/>
           </a:bodyPr>
           <a:lstStyle/>
@@ -3709,93 +3797,13 @@
               </a:spcAft>
             </a:pPr>
             <a:r>
-              <a:rPr sz="1152" b="0" i="0">
+              <a:rPr sz="1000" b="0" i="0">
                 <a:solidFill>
-                  <a:srgbClr val="E7F0F3"/>
+                  <a:srgbClr val="B4C7D2"/>
                 </a:solidFill>
                 <a:latin typeface="Arial"/>
               </a:rPr>
-              <a:t>• Δpc = 100 kPa</a:t>
-            </a:r>
-          </a:p>
-        </p:txBody>
-      </p:sp>
-      <p:sp>
-        <p:nvSpPr>
-          <p:cNvPr id="18" name="text 16" descr="sci-ppt:obj-016"/>
-          <p:cNvSpPr txBox="1"/>
-          <p:nvPr/>
-        </p:nvSpPr>
-        <p:spPr>
-          <a:xfrm>
-            <a:off x="365760" y="5285232"/>
-            <a:ext cx="8412480" cy="310896"/>
-          </a:xfrm>
-          <a:prstGeom prst="rect">
-            <a:avLst/>
-          </a:prstGeom>
-          <a:noFill/>
-          <a:effectLst/>
-        </p:spPr>
-        <p:txBody>
-          <a:bodyPr wrap="none" lIns="0" rIns="0" tIns="0" bIns="0" anchor="ctr">
-            <a:spAutoFit/>
-          </a:bodyPr>
-          <a:lstStyle/>
-          <a:p>
-            <a:pPr algn="l">
-              <a:spcAft>
-                <a:spcPts val="0"/>
-              </a:spcAft>
-            </a:pPr>
-            <a:r>
-              <a:rPr sz="1152" b="0" i="0">
-                <a:solidFill>
-                  <a:srgbClr val="E7F0F3"/>
-                </a:solidFill>
-                <a:latin typeface="Arial"/>
-              </a:rPr>
-              <a:t>Compare two distinct controls, not an actual gel-collapse prediction</a:t>
-            </a:r>
-          </a:p>
-        </p:txBody>
-      </p:sp>
-      <p:sp>
-        <p:nvSpPr>
-          <p:cNvPr id="19" name="text 17" descr="sci-ppt:obj-017"/>
-          <p:cNvSpPr txBox="1"/>
-          <p:nvPr/>
-        </p:nvSpPr>
-        <p:spPr>
-          <a:xfrm>
-            <a:off x="365760" y="5495544"/>
-            <a:ext cx="8412480" cy="310896"/>
-          </a:xfrm>
-          <a:prstGeom prst="rect">
-            <a:avLst/>
-          </a:prstGeom>
-          <a:noFill/>
-          <a:effectLst/>
-        </p:spPr>
-        <p:txBody>
-          <a:bodyPr wrap="none" lIns="0" rIns="0" tIns="0" bIns="0" anchor="ctr">
-            <a:spAutoFit/>
-          </a:bodyPr>
-          <a:lstStyle/>
-          <a:p>
-            <a:pPr algn="l">
-              <a:spcAft>
-                <a:spcPts val="0"/>
-              </a:spcAft>
-            </a:pPr>
-            <a:r>
-              <a:rPr sz="1152" b="0" i="0">
-                <a:solidFill>
-                  <a:srgbClr val="E7F0F3"/>
-                </a:solidFill>
-                <a:latin typeface="Arial"/>
-              </a:rPr>
-              <a:t>Support deformation need not equilibrate during the event</a:t>
+              <a:t>Teaching response-time comparison of Eq. A-E18 (Rₘₐₓ = 30 µm, ρₗ = 1000 kg/m³, Δp_c = 100 kPa, L_g = 30 µm).</a:t>
             </a:r>
           </a:p>
         </p:txBody>
